--- a/lecons/LSA/Climatology/LSA_CLIM_FS03_The_Climate_of_Cameroon.pptx
+++ b/lecons/LSA/Climatology/LSA_CLIM_FS03_The_Climate_of_Cameroon.pptx
@@ -3024,7 +3024,7 @@
           <a:p>
             <a:r>
               <a:rPr lang="en-US" dirty="0"/>
-              <a:t>Let us copy Location of Cameroon. Cameroon is situated as follows. Write each point on a new line, with the key term first. When you finish, we go to the next slide.</a:t>
+              <a:t>Let us copy Location of Cameroon. Cameroon is situated as follows. On this slide we have Latitude and longitude. Write each point on a new line, with the key term first, and explain it in your own words when we revise. When you finish, we go to the next slide.</a:t>
             </a:r>
             <a:endParaRPr lang="en-US" dirty="0"/>
           </a:p>
@@ -3112,7 +3112,7 @@
           <a:p>
             <a:r>
               <a:rPr lang="en-US" dirty="0"/>
-              <a:t>We continue with the same part. Write each point on a new line, with the key term first.</a:t>
+              <a:t>We continue with Location of Cameroon. On this slide we have Situation in Africa. Write each point on a new line, with the key term first, and explain it in your own words when we revise.</a:t>
             </a:r>
             <a:endParaRPr lang="en-US" dirty="0"/>
           </a:p>
@@ -3288,7 +3288,7 @@
           <a:p>
             <a:r>
               <a:rPr lang="en-US" dirty="0"/>
-              <a:t>Let us copy Equatorial Domain. The equatorial domain (south of about 6° N) includes. Write each point on a new line, with the key term first. When you finish, we go to the next slide.</a:t>
+              <a:t>Let us copy Equatorial Domain. The equatorial domain (south of about 6° N) includes. On this slide we have Guinea (equatorial) type. Write each point on a new line, with the key term first, and explain it in your own words when we revise. When you finish, we go to the next slide.</a:t>
             </a:r>
             <a:endParaRPr lang="en-US" dirty="0"/>
           </a:p>
@@ -3376,7 +3376,7 @@
           <a:p>
             <a:r>
               <a:rPr lang="en-US" dirty="0"/>
-              <a:t>We continue with the same part. Write each point on a new line, with the key term first. When you finish, we go to the next slide.</a:t>
+              <a:t>We continue with Equatorial Domain. Copy this carefully. When you finish, we go to the next slide.</a:t>
             </a:r>
             <a:endParaRPr lang="en-US" dirty="0"/>
           </a:p>
@@ -3552,7 +3552,7 @@
           <a:p>
             <a:r>
               <a:rPr lang="en-US" dirty="0"/>
-              <a:t>We continue with the same part. Write each point on a new line, with the key term first. When you finish, we go to the next slide.</a:t>
+              <a:t>We continue with Equatorial Domain. On this slide we have Cameroon (maritime) type. Write each point on a new line, with the key term first, and explain it in your own words when we revise. When you finish, we go to the next slide.</a:t>
             </a:r>
             <a:endParaRPr lang="en-US" dirty="0"/>
           </a:p>
@@ -3640,7 +3640,7 @@
           <a:p>
             <a:r>
               <a:rPr lang="en-US" dirty="0"/>
-              <a:t>We continue with the same part. Write each point on a new line, with the key term first.</a:t>
+              <a:t>We continue with Equatorial Domain. On this slide we have Mountain type. Write each point on a new line, with the key term first, and explain it in your own words when we revise.</a:t>
             </a:r>
             <a:endParaRPr lang="en-US" dirty="0"/>
           </a:p>
@@ -3816,7 +3816,7 @@
           <a:p>
             <a:r>
               <a:rPr lang="en-US" dirty="0"/>
-              <a:t>Let us copy Tropical Domain. The tropical domain (north of about 6° N) includes. Write each point on a new line, with the key term first. When you finish, we go to the next slide.</a:t>
+              <a:t>Let us copy Tropical Domain. The tropical domain (north of about 6° N) includes. On this slide we have Humid tropical (Sudan) type. Write each point on a new line, with the key term first, and explain it in your own words when we revise. When you finish, we go to the next slide.</a:t>
             </a:r>
             <a:endParaRPr lang="en-US" dirty="0"/>
           </a:p>
@@ -3904,7 +3904,7 @@
           <a:p>
             <a:r>
               <a:rPr lang="en-US" dirty="0"/>
-              <a:t>We continue with the same part. Write each point on a new line, with the key term first.</a:t>
+              <a:t>We continue with Tropical Domain. On this slide we have Dry tropical (Sahel) type. Write each point on a new line, with the key term first, and explain it in your own words when we revise.</a:t>
             </a:r>
             <a:endParaRPr lang="en-US" dirty="0"/>
           </a:p>
@@ -3992,7 +3992,7 @@
           <a:p>
             <a:r>
               <a:rPr lang="en-US" dirty="0"/>
-              <a:t>Let us copy Air Masses and Seasons. The climate of Cameroon is controlled by. Write each point on a new line, with the key term first. When you finish, we go to the next slide.</a:t>
+              <a:t>Let us copy Air Masses and Seasons. The climate of Cameroon is controlled by. On this slide we have Air masses and the ITCZ. Write each point on a new line, with the key term first, and explain it in your own words when we revise. When you finish, we go to the next slide.</a:t>
             </a:r>
             <a:endParaRPr lang="en-US" dirty="0"/>
           </a:p>
@@ -4080,7 +4080,7 @@
           <a:p>
             <a:r>
               <a:rPr lang="en-US" dirty="0"/>
-              <a:t>We continue with the same part. Write each point on a new line, with the key term first.</a:t>
+              <a:t>We continue with Air Masses and Seasons. On this slide we have Seasons and continentality. Write each point on a new line, with the key term first, and explain it in your own words when we revise.</a:t>
             </a:r>
             <a:endParaRPr lang="en-US" dirty="0"/>
           </a:p>
@@ -5400,7 +5400,7 @@
           <a:p>
             <a:r>
               <a:rPr lang="en-US" dirty="0"/>
-              <a:t>Here is the plan of our lesson today. We shall correction of the homework; then objectives and recall; then real-life situation and action to take; then learning activities; then board summary; then evaluation, remediation and homework.</a:t>
+              <a:t>Here is the plan of our lesson today. First, we shall correct the homework. Then we shall look at the objectives and recall what you already know. After that, we shall study a situation from real life and the action to take, and do the learning activities. Finally, we shall copy the board summary, do the evaluation and the remediation, and I will give you the homework.</a:t>
             </a:r>
             <a:endParaRPr lang="en-US" dirty="0"/>
           </a:p>
@@ -6940,7 +6940,7 @@
                 <a:ea typeface="Times New Roman" pitchFamily="34" charset="-122"/>
                 <a:cs typeface="Times New Roman" pitchFamily="34" charset="-120"/>
               </a:rPr>
-              <a:t>Further Study 3: The Climate of Cameroon</a:t>
+              <a:t>Further Study 3</a:t>
             </a:r>
             <a:endParaRPr lang="en-US" sz="2600" dirty="0"/>
           </a:p>
